--- a/slides/FA24-BEDS-034.pptx
+++ b/slides/FA24-BEDS-034.pptx
@@ -696,7 +696,7 @@
           </a:prstGeom>
           <a:extLst>
             <a:ext uri="{C572A759-6A51-4108-AA02-DFA0A04FC94B}">
-              <ma14:wrappingTextBoxFlag xmlns:ma14="http://schemas.microsoft.com/office/mac/drawingml/2011/main" xmlns="" val="0"/>
+              <ma14:wrappingTextBoxFlag xmlns="" xmlns:ma14="http://schemas.microsoft.com/office/mac/drawingml/2011/main" val="0"/>
             </a:ext>
           </a:extLst>
         </p:spPr>
@@ -771,7 +771,7 @@
           </a:prstGeom>
           <a:extLst>
             <a:ext uri="{C572A759-6A51-4108-AA02-DFA0A04FC94B}">
-              <ma14:wrappingTextBoxFlag xmlns:ma14="http://schemas.microsoft.com/office/mac/drawingml/2011/main" xmlns="" val="0"/>
+              <ma14:wrappingTextBoxFlag xmlns="" xmlns:ma14="http://schemas.microsoft.com/office/mac/drawingml/2011/main" val="0"/>
             </a:ext>
           </a:extLst>
         </p:spPr>
@@ -2050,7 +2050,7 @@
           </a:prstGeom>
           <a:extLst>
             <a:ext uri="{C572A759-6A51-4108-AA02-DFA0A04FC94B}">
-              <ma14:wrappingTextBoxFlag xmlns:ma14="http://schemas.microsoft.com/office/mac/drawingml/2011/main" xmlns="" val="0"/>
+              <ma14:wrappingTextBoxFlag xmlns="" xmlns:ma14="http://schemas.microsoft.com/office/mac/drawingml/2011/main" val="0"/>
             </a:ext>
           </a:extLst>
         </p:spPr>
@@ -2236,56 +2236,6 @@
           </a:ln>
         </p:spPr>
       </p:sp>
-      <p:sp>
-        <p:nvSpPr>
-          <p:cNvPr id="6" name="Text 4"/>
-          <p:cNvSpPr txBox="1"/>
-          <p:nvPr/>
-        </p:nvSpPr>
-        <p:spPr>
-          <a:xfrm>
-            <a:off x="372794" y="1346454"/>
-            <a:ext cx="4023360" cy="2450592"/>
-          </a:xfrm>
-          <a:prstGeom prst="rect">
-            <a:avLst/>
-          </a:prstGeom>
-          <a:noFill/>
-          <a:ln/>
-        </p:spPr>
-        <p:txBody>
-          <a:bodyPr wrap="square" rtlCol="0" anchor="ctr"/>
-          <a:lstStyle/>
-          <a:p>
-            <a:pPr marL="0" indent="0" algn="ctr">
-              <a:buNone/>
-            </a:pPr>
-            <a:r>
-              <a:rPr lang="en-US" sz="1400" dirty="0">
-                <a:solidFill>
-                  <a:srgbClr val="7A8896"/>
-                </a:solidFill>
-              </a:rPr>
-              <a:t>INSERT figures/default.svg HERE</a:t>
-            </a:r>
-            <a:endParaRPr lang="en-US" sz="1400" dirty="0"/>
-          </a:p>
-          <a:p>
-            <a:pPr marL="0" indent="0" algn="ctr">
-              <a:buNone/>
-            </a:pPr>
-            <a:r>
-              <a:rPr lang="en-US" sz="1400" dirty="0">
-                <a:solidFill>
-                  <a:srgbClr val="7A8896"/>
-                </a:solidFill>
-              </a:rPr>
-              <a:t>(Insert → Pictures)</a:t>
-            </a:r>
-            <a:endParaRPr lang="en-US" sz="1400" dirty="0"/>
-          </a:p>
-        </p:txBody>
-      </p:sp>
       <p:pic>
         <p:nvPicPr>
           <p:cNvPr id="7" name="Image 0" descr="Weighted literacy rate by age band for women and men, with the largest gap marked at ages 30-34"/>
@@ -2406,7 +2356,7 @@
           </a:prstGeom>
           <a:extLst>
             <a:ext uri="{C572A759-6A51-4108-AA02-DFA0A04FC94B}">
-              <ma14:wrappingTextBoxFlag xmlns:ma14="http://schemas.microsoft.com/office/mac/drawingml/2011/main" xmlns="" val="0"/>
+              <ma14:wrappingTextBoxFlag xmlns="" xmlns:ma14="http://schemas.microsoft.com/office/mac/drawingml/2011/main" val="0"/>
             </a:ext>
           </a:extLst>
         </p:spPr>
@@ -2459,7 +2409,7 @@
         </p:blipFill>
         <p:spPr>
           <a:xfrm>
-            <a:off x="457200" y="1257300"/>
+            <a:off x="407963" y="1234440"/>
             <a:ext cx="4072597" cy="2492654"/>
           </a:xfrm>
           <a:prstGeom prst="rect">
@@ -2872,7 +2822,7 @@
           </a:prstGeom>
           <a:extLst>
             <a:ext uri="{C572A759-6A51-4108-AA02-DFA0A04FC94B}">
-              <ma14:wrappingTextBoxFlag xmlns:ma14="http://schemas.microsoft.com/office/mac/drawingml/2011/main" xmlns="" val="0"/>
+              <ma14:wrappingTextBoxFlag xmlns="" xmlns:ma14="http://schemas.microsoft.com/office/mac/drawingml/2011/main" val="0"/>
             </a:ext>
           </a:extLst>
         </p:spPr>
